--- a/contracts/cases/HERRERA-001/entregables/HERRERA-001_Presentacion_Inversores.pptx
+++ b/contracts/cases/HERRERA-001/entregables/HERRERA-001_Presentacion_Inversores.pptx
@@ -7217,6 +7217,30 @@
                 <a:ea typeface="Poppins" pitchFamily="34" charset="-122"/>
                 <a:cs typeface="Poppins" pitchFamily="34" charset="-120"/>
               </a:rPr>
+              <a:t>Un análisis de mercado de terreno (AMC de un tercero) sugiere un valor de terreno menor al asignado dentro del precio de compra — no cambia el precio total ni el margen del proyecto; se recomienda una tasación formal antes del cierre.</a:t>
+            </a:r>
+            <a:endParaRPr lang="en-US" sz="1400" dirty="0"/>
+          </a:p>
+          <a:p>
+            <a:pPr marL="228600" indent="-228600">
+              <a:lnSpc>
+                <a:spcPts val="2000"/>
+              </a:lnSpc>
+              <a:spcAft>
+                <a:spcPts val="1200"/>
+              </a:spcAft>
+              <a:buSzPct val="100000"/>
+              <a:buChar char="•"/>
+            </a:pPr>
+            <a:r>
+              <a:rPr lang="en-US" sz="1400" dirty="0">
+                <a:solidFill>
+                  <a:srgbClr val="14313A"/>
+                </a:solidFill>
+                <a:latin typeface="Poppins" pitchFamily="34" charset="0"/>
+                <a:ea typeface="Poppins" pitchFamily="34" charset="-122"/>
+                <a:cs typeface="Poppins" pitchFamily="34" charset="-120"/>
+              </a:rPr>
               <a:t>Toda inversión en desarrollo está sujeta a riesgos de demora de obra y variación de costos de construcción.</a:t>
             </a:r>
             <a:endParaRPr lang="en-US" sz="1400" dirty="0"/>

--- a/contracts/cases/HERRERA-001/entregables/HERRERA-001_Presentacion_Inversores.pptx
+++ b/contracts/cases/HERRERA-001/entregables/HERRERA-001_Presentacion_Inversores.pptx
@@ -2245,7 +2245,7 @@
               <a:buNone/>
             </a:pPr>
             <a:r>
-              <a:rPr lang="en-US" sz="1300" b="1" dirty="0">
+              <a:rPr lang="en-US" sz="1300" dirty="0">
                 <a:solidFill>
                   <a:srgbClr val="F3EDE3"/>
                 </a:solidFill>
@@ -2253,21 +2253,7 @@
                 <a:ea typeface="Poppins" pitchFamily="34" charset="-122"/>
                 <a:cs typeface="Poppins" pitchFamily="34" charset="-120"/>
               </a:rPr>
-              <a:t>+595 982 853 111</a:t>
-            </a:r>
-            <a:pPr indent="0" marL="0">
-              <a:buNone/>
-            </a:pPr>
-            <a:r>
-              <a:rPr lang="en-US" sz="1300" dirty="0">
-                <a:solidFill>
-                  <a:srgbClr val="F3EDE3"/>
-                </a:solidFill>
-                <a:latin typeface="Poppins" pitchFamily="34" charset="0"/>
-                <a:ea typeface="Poppins" pitchFamily="34" charset="-122"/>
-                <a:cs typeface="Poppins" pitchFamily="34" charset="-120"/>
-              </a:rPr>
-              <a:t>     ·     juancastillo@meridianocapital.net     ·     www.meridianocapital.net</a:t>
+              <a:t>+595 982 853 111     ·     juancastillo@meridianocapital.net     ·     www.meridianocapital.net</a:t>
             </a:r>
             <a:endParaRPr lang="en-US" sz="1300" dirty="0"/>
           </a:p>
@@ -7217,7 +7203,7 @@
                 <a:ea typeface="Poppins" pitchFamily="34" charset="-122"/>
                 <a:cs typeface="Poppins" pitchFamily="34" charset="-120"/>
               </a:rPr>
-              <a:t>Un análisis de mercado de terreno (AMC de un tercero) sugiere un valor de terreno menor al asignado dentro del precio de compra — no cambia el precio total ni el margen del proyecto; se recomienda una tasación formal antes del cierre.</a:t>
+              <a:t>Un análisis de mercado de terreno (AMC de un tercero) sugería un valor de terreno vacío menor al asignado dentro del precio de compra — la diferencia se explica por el valor de una construcción preexistente en el lote más su demolición (no hay lotes vacíos en la zona); no cambia el precio total ni el margen del proyecto.</a:t>
             </a:r>
             <a:endParaRPr lang="en-US" sz="1400" dirty="0"/>
           </a:p>

--- a/contracts/cases/HERRERA-001/entregables/HERRERA-001_Presentacion_Inversores.pptx
+++ b/contracts/cases/HERRERA-001/entregables/HERRERA-001_Presentacion_Inversores.pptx
@@ -4618,7 +4618,7 @@
                 <a:ea typeface="Fraunces" pitchFamily="34" charset="-122"/>
                 <a:cs typeface="Fraunces" pitchFamily="34" charset="-120"/>
               </a:rPr>
-              <a:t>USD 784.541 – 1.091.147</a:t>
+              <a:t>USD 929.331 – 1.231.069</a:t>
             </a:r>
             <a:endParaRPr lang="en-US" sz="1600" dirty="0"/>
           </a:p>
@@ -4727,7 +4727,7 @@
                 <a:ea typeface="Fraunces" pitchFamily="34" charset="-122"/>
                 <a:cs typeface="Fraunces" pitchFamily="34" charset="-120"/>
               </a:rPr>
-              <a:t>24,6% – 34,3%</a:t>
+              <a:t>29,2% – 38,6%</a:t>
             </a:r>
             <a:endParaRPr lang="en-US" sz="2400" dirty="0"/>
           </a:p>
@@ -6043,7 +6043,7 @@
                 <a:ea typeface="Poppins" pitchFamily="34" charset="-122"/>
                 <a:cs typeface="Poppins" pitchFamily="34" charset="-120"/>
               </a:rPr>
-              <a:t>Régimen tributario del desarrollador confirmado: 10% IVA + 10% impuesto a la renta</a:t>
+              <a:t>Régimen tributario del desarrollador confirmado: 1,5% IVA efectivo sobre el precio de venta (corregido 2026-08-23) + 10% impuesto a la renta</a:t>
             </a:r>
             <a:endParaRPr lang="en-US" sz="1250" dirty="0"/>
           </a:p>
